--- a/lectures/b06/ppt/b06-l05.pptx
+++ b/lectures/b06/ppt/b06-l05.pptx
@@ -10649,7 +10649,7 @@
                 <a:ea typeface="Malgun Gothic"/>
                 <a:cs typeface="Malgun Gothic"/>
               </a:rPr>
-              <a:t> 인핸서에 집중 → AD를 '미세아교세포 질환'으로 보는 관점(B08 L04).</a:t>
+              <a:t> 인핸서에 집중 → AD를 '미세아교세포 질환'으로 보는 관점(B08 L07).</a:t>
             </a:r>
           </a:p>
           <a:p>
